--- a/deck/Gridlint.pptx
+++ b/deck/Gridlint.pptx
@@ -3681,7 +3681,7 @@
                 </a:solidFill>
                 <a:latin typeface="Segoe UI"/>
               </a:rPr>
-              <a:t>·  Formula engine, 42 functions, 93/93 against Excel</a:t>
+              <a:t>·  Formula engine, 90 functions, 156/156 against Excel</a:t>
             </a:r>
           </a:p>
           <a:p>
@@ -3719,7 +3719,7 @@
                 </a:solidFill>
                 <a:latin typeface="Segoe UI"/>
               </a:rPr>
-              <a:t>·  13 rules, impact measured by recalculation</a:t>
+              <a:t>·  15 rules, impact measured by recalculation</a:t>
             </a:r>
           </a:p>
           <a:p>
@@ -3757,7 +3757,26 @@
                 </a:solidFill>
                 <a:latin typeface="Segoe UI"/>
               </a:rPr>
-              <a:t>·  CLI, CI workflow, Docker, 113 tests</a:t>
+              <a:t>·  Dependency trace: where a number actually comes from</a:t>
+            </a:r>
+          </a:p>
+          <a:p>
+            <a:pPr algn="l">
+              <a:lnSpc>
+                <a:spcPct val="115000"/>
+              </a:lnSpc>
+              <a:spcAft>
+                <a:spcPts val="600"/>
+              </a:spcAft>
+            </a:pPr>
+            <a:r>
+              <a:rPr sz="1350" b="0">
+                <a:solidFill>
+                  <a:srgbClr val="55635F"/>
+                </a:solidFill>
+                <a:latin typeface="Segoe UI"/>
+              </a:rPr>
+              <a:t>·  CLI, CI workflow, Docker, 151 tests</a:t>
             </a:r>
           </a:p>
         </p:txBody>
@@ -3883,7 +3902,7 @@
                 </a:solidFill>
                 <a:latin typeface="Segoe UI"/>
               </a:rPr>
-              <a:t>·  More of Excel: array formulas, XLOOKUP, SUMIFS, date functions</a:t>
+              <a:t>·  More of Excel: array formulas, dynamic arrays, LET and LAMBDA</a:t>
             </a:r>
           </a:p>
           <a:p>
@@ -8074,7 +8093,7 @@
                 </a:solidFill>
                 <a:latin typeface="Segoe UI"/>
               </a:rPr>
-              <a:t>42 functions,
+              <a:t>90 functions,
 Excel's coercion rules</a:t>
             </a:r>
           </a:p>
@@ -8205,7 +8224,7 @@
                 </a:solidFill>
                 <a:latin typeface="Segoe UI"/>
               </a:rPr>
-              <a:t>13 rules</a:t>
+              <a:t>15 rules</a:t>
             </a:r>
           </a:p>
           <a:p>
@@ -10151,13 +10170,13 @@
               </a:spcAft>
             </a:pPr>
             <a:r>
-              <a:rPr sz="3400" b="1">
+              <a:rPr sz="3000" b="1">
                 <a:solidFill>
                   <a:srgbClr val="16211F"/>
                 </a:solidFill>
                 <a:latin typeface="Segoe UI"/>
               </a:rPr>
-              <a:t>Three numbers, all reproducible from the repository.</a:t>
+              <a:t>Four numbers, all reproducible from the repository.</a:t>
             </a:r>
           </a:p>
         </p:txBody>
@@ -10245,7 +10264,7 @@
                 </a:solidFill>
                 <a:latin typeface="Segoe UI"/>
               </a:rPr>
-              <a:t>93 / 93</a:t>
+              <a:t>156 / 156</a:t>
             </a:r>
           </a:p>
           <a:p>
@@ -10371,7 +10390,7 @@
                 </a:solidFill>
                 <a:latin typeface="Segoe UI"/>
               </a:rPr>
-              <a:t>141 / 141</a:t>
+              <a:t>182 / 182</a:t>
             </a:r>
           </a:p>
           <a:p>
@@ -10409,7 +10428,7 @@
                 </a:solidFill>
                 <a:latin typeface="Segoe UI"/>
               </a:rPr>
-              <a:t>Six kinds of defect injected into twelve clean workbooks, every mutant recalculated by Excel, then scored on whether the right rule named the right cell.</a:t>
+              <a:t>Eight kinds of defect injected into twelve clean workbooks, every mutant recalculated by Excel, then scored on whether the right rule named the right cell.</a:t>
             </a:r>
           </a:p>
         </p:txBody>
@@ -10516,7 +10535,7 @@
                 </a:solidFill>
                 <a:latin typeface="Segoe UI"/>
               </a:rPr>
-              <a:t>findings on 12 clean workbooks, 1,368 formulas</a:t>
+              <a:t>findings on 12 clean workbooks, 1,059 formulas</a:t>
             </a:r>
           </a:p>
           <a:p>
@@ -10535,7 +10554,7 @@
                 </a:solidFill>
                 <a:latin typeface="Segoe UI"/>
               </a:rPr>
-              <a:t>Blank spacer rows, subtotals rolled into a grand total, cross-sheet assumptions, VLOOKUP tables. A checker that cries wolf is one nobody keeps installed.</a:t>
+              <a:t>Blank spacer rows, subtotals rolled into a grand total, cross-sheet assumptions, VLOOKUP tables, hidden helper columns. A checker that cries wolf gets uninstalled.</a:t>
             </a:r>
           </a:p>
         </p:txBody>
@@ -10548,8 +10567,8 @@
         </p:nvSpPr>
         <p:spPr>
           <a:xfrm>
-            <a:off x="777240" y="4526280"/>
-            <a:ext cx="10652760" cy="1371600"/>
+            <a:off x="777240" y="4480560"/>
+            <a:ext cx="5212080" cy="1600200"/>
           </a:xfrm>
           <a:prstGeom prst="roundRect">
             <a:avLst>
@@ -10594,8 +10613,8 @@
         </p:nvSpPr>
         <p:spPr>
           <a:xfrm>
-            <a:off x="1051560" y="4736592"/>
-            <a:ext cx="10058400" cy="1097280"/>
+            <a:off x="1051560" y="4663440"/>
+            <a:ext cx="4663440" cy="1371600"/>
           </a:xfrm>
           <a:prstGeom prst="rect">
             <a:avLst/>
@@ -10617,46 +10636,92 @@
               </a:spcAft>
             </a:pPr>
             <a:r>
-              <a:rPr sz="1500" b="1">
+              <a:rPr sz="1400" b="1">
                 <a:solidFill>
                   <a:srgbClr val="D1344B"/>
                 </a:solidFill>
                 <a:latin typeface="Segoe UI"/>
               </a:rPr>
-              <a:t>The benchmark earned its keep during the build.</a:t>
-            </a:r>
-          </a:p>
-          <a:p>
-            <a:pPr algn="l">
-              <a:lnSpc>
-                <a:spcPct val="115000"/>
-              </a:lnSpc>
-              <a:spcAft>
-                <a:spcPts val="600"/>
-              </a:spcAft>
-            </a:pPr>
-            <a:r>
-              <a:rPr sz="1300" b="0">
+              <a:t>The benchmark earned its keep.</a:t>
+            </a:r>
+          </a:p>
+          <a:p>
+            <a:pPr algn="l">
+              <a:lnSpc>
+                <a:spcPct val="115000"/>
+              </a:lnSpc>
+              <a:spcAft>
+                <a:spcPts val="600"/>
+              </a:spcAft>
+            </a:pPr>
+            <a:r>
+              <a:rPr sz="1200" b="0">
                 <a:solidFill>
                   <a:srgbClr val="55635F"/>
                 </a:solidFill>
                 <a:latin typeface="Segoe UI"/>
               </a:rPr>
-              <a:t>It caught a real bug in Gridlint's own arithmetic: ROUND used a relative epsilon to correct binary representation error, which rounded 3,806,241.4967 up to 3,806,242. It now rounds in decimal. That is what a benchmark is for.</a:t>
-            </a:r>
-          </a:p>
-        </p:txBody>
-      </p:sp>
-      <p:sp>
-        <p:nvSpPr>
-          <p:cNvPr id="13" name="TextBox 12"/>
+              <a:t>It caught a real bug in Gridlint's own arithmetic: ROUND used a relative epsilon to correct binary representation error, which turned 3,806,241.4967 into 3,806,242. It now rounds in decimal.</a:t>
+            </a:r>
+          </a:p>
+        </p:txBody>
+      </p:sp>
+      <p:sp>
+        <p:nvSpPr>
+          <p:cNvPr id="13" name="Rounded Rectangle 12"/>
+          <p:cNvSpPr/>
+          <p:nvPr/>
+        </p:nvSpPr>
+        <p:spPr>
+          <a:xfrm>
+            <a:off x="6217920" y="4480560"/>
+            <a:ext cx="5212080" cy="1600200"/>
+          </a:xfrm>
+          <a:prstGeom prst="roundRect">
+            <a:avLst>
+              <a:gd name="adj" fmla="val 6000"/>
+            </a:avLst>
+          </a:prstGeom>
+          <a:solidFill>
+            <a:srgbClr val="E6F4F1"/>
+          </a:solidFill>
+          <a:ln w="12700">
+            <a:solidFill>
+              <a:srgbClr val="E6F4F1"/>
+            </a:solidFill>
+          </a:ln>
+          <a:effectLst/>
+        </p:spPr>
+        <p:style>
+          <a:lnRef idx="1">
+            <a:schemeClr val="accent1"/>
+          </a:lnRef>
+          <a:fillRef idx="3">
+            <a:schemeClr val="accent1"/>
+          </a:fillRef>
+          <a:effectRef idx="2">
+            <a:schemeClr val="accent1"/>
+          </a:effectRef>
+          <a:fontRef idx="minor">
+            <a:schemeClr val="lt1"/>
+          </a:fontRef>
+        </p:style>
+        <p:txBody>
+          <a:bodyPr rtlCol="0" anchor="ctr"/>
+          <a:lstStyle/>
+          <a:p/>
+        </p:txBody>
+      </p:sp>
+      <p:sp>
+        <p:nvSpPr>
+          <p:cNvPr id="14" name="TextBox 13"/>
           <p:cNvSpPr txBox="1"/>
           <p:nvPr/>
         </p:nvSpPr>
         <p:spPr>
           <a:xfrm>
-            <a:off x="777240" y="6355080"/>
-            <a:ext cx="7315200" cy="274320"/>
+            <a:off x="6492240" y="4663440"/>
+            <a:ext cx="4663440" cy="1371600"/>
           </a:xfrm>
           <a:prstGeom prst="rect">
             <a:avLst/>
@@ -10678,6 +10743,67 @@
               </a:spcAft>
             </a:pPr>
             <a:r>
+              <a:rPr sz="1400" b="1">
+                <a:solidFill>
+                  <a:srgbClr val="0F766E"/>
+                </a:solidFill>
+                <a:latin typeface="Segoe UI"/>
+              </a:rPr>
+              <a:t>And a fourth number: 7 seconds.</a:t>
+            </a:r>
+          </a:p>
+          <a:p>
+            <a:pPr algn="l">
+              <a:lnSpc>
+                <a:spcPct val="115000"/>
+              </a:lnSpc>
+              <a:spcAft>
+                <a:spcPts val="600"/>
+              </a:spcAft>
+            </a:pPr>
+            <a:r>
+              <a:rPr sz="1200" b="0">
+                <a:solidFill>
+                  <a:srgbClr val="55635F"/>
+                </a:solidFill>
+                <a:latin typeface="Segoe UI"/>
+              </a:rPr>
+              <a:t>A 23,000-formula model, audited end to end. Profiling it found two quadratic passes that had been costing 37 seconds. The evaluator runs at 88,000 formulas a second.</a:t>
+            </a:r>
+          </a:p>
+        </p:txBody>
+      </p:sp>
+      <p:sp>
+        <p:nvSpPr>
+          <p:cNvPr id="15" name="TextBox 14"/>
+          <p:cNvSpPr txBox="1"/>
+          <p:nvPr/>
+        </p:nvSpPr>
+        <p:spPr>
+          <a:xfrm>
+            <a:off x="777240" y="6355080"/>
+            <a:ext cx="7315200" cy="274320"/>
+          </a:xfrm>
+          <a:prstGeom prst="rect">
+            <a:avLst/>
+          </a:prstGeom>
+          <a:noFill/>
+        </p:spPr>
+        <p:txBody>
+          <a:bodyPr wrap="square" anchor="t" lIns="0" rIns="0" tIns="0" bIns="0">
+            <a:spAutoFit/>
+          </a:bodyPr>
+          <a:lstStyle/>
+          <a:p>
+            <a:pPr algn="l">
+              <a:lnSpc>
+                <a:spcPct val="115000"/>
+              </a:lnSpc>
+              <a:spcAft>
+                <a:spcPts val="600"/>
+              </a:spcAft>
+            </a:pPr>
+            <a:r>
               <a:rPr sz="1000" b="0">
                 <a:solidFill>
                   <a:srgbClr val="8B9793"/>
@@ -10691,7 +10817,7 @@
       </p:sp>
       <p:sp>
         <p:nvSpPr>
-          <p:cNvPr id="14" name="TextBox 13"/>
+          <p:cNvPr id="16" name="TextBox 15"/>
           <p:cNvSpPr txBox="1"/>
           <p:nvPr/>
         </p:nvSpPr>
